--- a/sellers-posterdraft.pptx
+++ b/sellers-posterdraft.pptx
@@ -197,7 +197,7 @@
           <a:p>
             <a:fld id="{4235B92B-88B0-41E2-BFE9-BEEB64EE629D}" type="datetimeFigureOut">
               <a:rPr lang="en-US" smtClean="0"/>
-              <a:t>4/16/25</a:t>
+              <a:t>4/30/2025</a:t>
             </a:fld>
             <a:endParaRPr lang="en-US"/>
           </a:p>
@@ -828,7 +828,7 @@
           <a:p>
             <a:fld id="{3F135061-2F74-46D4-9F8F-C77EF304855D}" type="datetimeFigureOut">
               <a:rPr lang="en-US" smtClean="0"/>
-              <a:t>4/16/25</a:t>
+              <a:t>4/30/2025</a:t>
             </a:fld>
             <a:endParaRPr lang="en-US"/>
           </a:p>
@@ -998,7 +998,7 @@
           <a:p>
             <a:fld id="{3F135061-2F74-46D4-9F8F-C77EF304855D}" type="datetimeFigureOut">
               <a:rPr lang="en-US" smtClean="0"/>
-              <a:t>4/16/25</a:t>
+              <a:t>4/30/2025</a:t>
             </a:fld>
             <a:endParaRPr lang="en-US"/>
           </a:p>
@@ -1178,7 +1178,7 @@
           <a:p>
             <a:fld id="{3F135061-2F74-46D4-9F8F-C77EF304855D}" type="datetimeFigureOut">
               <a:rPr lang="en-US" smtClean="0"/>
-              <a:t>4/16/25</a:t>
+              <a:t>4/30/2025</a:t>
             </a:fld>
             <a:endParaRPr lang="en-US"/>
           </a:p>
@@ -1348,7 +1348,7 @@
           <a:p>
             <a:fld id="{3F135061-2F74-46D4-9F8F-C77EF304855D}" type="datetimeFigureOut">
               <a:rPr lang="en-US" smtClean="0"/>
-              <a:t>4/16/25</a:t>
+              <a:t>4/30/2025</a:t>
             </a:fld>
             <a:endParaRPr lang="en-US"/>
           </a:p>
@@ -1592,7 +1592,7 @@
           <a:p>
             <a:fld id="{3F135061-2F74-46D4-9F8F-C77EF304855D}" type="datetimeFigureOut">
               <a:rPr lang="en-US" smtClean="0"/>
-              <a:t>4/16/25</a:t>
+              <a:t>4/30/2025</a:t>
             </a:fld>
             <a:endParaRPr lang="en-US"/>
           </a:p>
@@ -1824,7 +1824,7 @@
           <a:p>
             <a:fld id="{3F135061-2F74-46D4-9F8F-C77EF304855D}" type="datetimeFigureOut">
               <a:rPr lang="en-US" smtClean="0"/>
-              <a:t>4/16/25</a:t>
+              <a:t>4/30/2025</a:t>
             </a:fld>
             <a:endParaRPr lang="en-US"/>
           </a:p>
@@ -2191,7 +2191,7 @@
           <a:p>
             <a:fld id="{3F135061-2F74-46D4-9F8F-C77EF304855D}" type="datetimeFigureOut">
               <a:rPr lang="en-US" smtClean="0"/>
-              <a:t>4/16/25</a:t>
+              <a:t>4/30/2025</a:t>
             </a:fld>
             <a:endParaRPr lang="en-US"/>
           </a:p>
@@ -2309,7 +2309,7 @@
           <a:p>
             <a:fld id="{3F135061-2F74-46D4-9F8F-C77EF304855D}" type="datetimeFigureOut">
               <a:rPr lang="en-US" smtClean="0"/>
-              <a:t>4/16/25</a:t>
+              <a:t>4/30/2025</a:t>
             </a:fld>
             <a:endParaRPr lang="en-US"/>
           </a:p>
@@ -2404,7 +2404,7 @@
           <a:p>
             <a:fld id="{3F135061-2F74-46D4-9F8F-C77EF304855D}" type="datetimeFigureOut">
               <a:rPr lang="en-US" smtClean="0"/>
-              <a:t>4/16/25</a:t>
+              <a:t>4/30/2025</a:t>
             </a:fld>
             <a:endParaRPr lang="en-US"/>
           </a:p>
@@ -2681,7 +2681,7 @@
           <a:p>
             <a:fld id="{3F135061-2F74-46D4-9F8F-C77EF304855D}" type="datetimeFigureOut">
               <a:rPr lang="en-US" smtClean="0"/>
-              <a:t>4/16/25</a:t>
+              <a:t>4/30/2025</a:t>
             </a:fld>
             <a:endParaRPr lang="en-US"/>
           </a:p>
@@ -2938,7 +2938,7 @@
           <a:p>
             <a:fld id="{3F135061-2F74-46D4-9F8F-C77EF304855D}" type="datetimeFigureOut">
               <a:rPr lang="en-US" smtClean="0"/>
-              <a:t>4/16/25</a:t>
+              <a:t>4/30/2025</a:t>
             </a:fld>
             <a:endParaRPr lang="en-US"/>
           </a:p>
@@ -3151,7 +3151,7 @@
           <a:p>
             <a:fld id="{3F135061-2F74-46D4-9F8F-C77EF304855D}" type="datetimeFigureOut">
               <a:rPr lang="en-US" smtClean="0"/>
-              <a:t>4/16/25</a:t>
+              <a:t>4/30/2025</a:t>
             </a:fld>
             <a:endParaRPr lang="en-US"/>
           </a:p>
@@ -3726,7 +3726,7 @@
         <p:spPr>
           <a:xfrm>
             <a:off x="11547574" y="3690474"/>
-            <a:ext cx="23090341" cy="9570821"/>
+            <a:ext cx="9857699" cy="9570821"/>
           </a:xfrm>
         </p:spPr>
         <p:txBody>
@@ -3745,20 +3745,12 @@
                 <a:solidFill>
                   <a:schemeClr val="bg1"/>
                 </a:solidFill>
-                <a:latin typeface="Lato Black" panose="020F0A02020204030203" pitchFamily="34" charset="0"/>
-                <a:ea typeface="Segoe UI Black" panose="020B0A02040204020203" pitchFamily="34" charset="0"/>
+                <a:latin typeface="Lato" panose="020F0502020204030203" pitchFamily="34" charset="0"/>
+                <a:ea typeface="Roboto" panose="02000000000000000000" pitchFamily="2" charset="0"/>
                 <a:cs typeface="Segoe UI" panose="020B0502040204020203" pitchFamily="34" charset="0"/>
               </a:rPr>
-              <a:t>Add a big tagline summary or something here with picture of the app below!</a:t>
-            </a:r>
-            <a:endParaRPr lang="en-US" sz="11111" dirty="0">
-              <a:solidFill>
-                <a:schemeClr val="bg1"/>
-              </a:solidFill>
-              <a:latin typeface="Lato" panose="020F0502020204030203" pitchFamily="34" charset="0"/>
-              <a:ea typeface="Roboto" panose="02000000000000000000" pitchFamily="2" charset="0"/>
-              <a:cs typeface="Segoe UI" panose="020B0502040204020203" pitchFamily="34" charset="0"/>
-            </a:endParaRPr>
+              <a:t>Creation of the app and some of the default code</a:t>
+            </a:r>
           </a:p>
         </p:txBody>
       </p:sp>
@@ -4531,510 +4523,6 @@
                 <a:cs typeface="Segoe UI" panose="020B0502040204020203" pitchFamily="34" charset="0"/>
               </a:rPr>
               <a:t> This section is just for you.</a:t>
-            </a:r>
-          </a:p>
-        </p:txBody>
-      </p:sp>
-      <p:sp>
-        <p:nvSpPr>
-          <p:cNvPr id="9" name="Graphic 7">
-            <a:extLst>
-              <a:ext uri="{FF2B5EF4-FFF2-40B4-BE49-F238E27FC236}">
-                <a16:creationId xmlns:a16="http://schemas.microsoft.com/office/drawing/2014/main" id="{9914F9AF-0FB9-4924-8DCA-B46EEB713FE9}"/>
-              </a:ext>
-            </a:extLst>
-          </p:cNvPr>
-          <p:cNvSpPr/>
-          <p:nvPr/>
-        </p:nvSpPr>
-        <p:spPr>
-          <a:xfrm>
-            <a:off x="16292755" y="27075460"/>
-            <a:ext cx="1117158" cy="1932381"/>
-          </a:xfrm>
-          <a:custGeom>
-            <a:avLst/>
-            <a:gdLst>
-              <a:gd name="connsiteX0" fmla="*/ 321256 w 2089376"/>
-              <a:gd name="connsiteY0" fmla="*/ 0 h 3614056"/>
-              <a:gd name="connsiteX1" fmla="*/ 0 w 2089376"/>
-              <a:gd name="connsiteY1" fmla="*/ 321256 h 3614056"/>
-              <a:gd name="connsiteX2" fmla="*/ 0 w 2089376"/>
-              <a:gd name="connsiteY2" fmla="*/ 3292801 h 3614056"/>
-              <a:gd name="connsiteX3" fmla="*/ 321256 w 2089376"/>
-              <a:gd name="connsiteY3" fmla="*/ 3614057 h 3614056"/>
-              <a:gd name="connsiteX4" fmla="*/ 1815047 w 2089376"/>
-              <a:gd name="connsiteY4" fmla="*/ 3614057 h 3614056"/>
-              <a:gd name="connsiteX5" fmla="*/ 2136303 w 2089376"/>
-              <a:gd name="connsiteY5" fmla="*/ 3292801 h 3614056"/>
-              <a:gd name="connsiteX6" fmla="*/ 2136303 w 2089376"/>
-              <a:gd name="connsiteY6" fmla="*/ 321256 h 3614056"/>
-              <a:gd name="connsiteX7" fmla="*/ 1815047 w 2089376"/>
-              <a:gd name="connsiteY7" fmla="*/ 0 h 3614056"/>
-              <a:gd name="connsiteX8" fmla="*/ 321256 w 2089376"/>
-              <a:gd name="connsiteY8" fmla="*/ 0 h 3614056"/>
-              <a:gd name="connsiteX9" fmla="*/ 889115 w 2089376"/>
-              <a:gd name="connsiteY9" fmla="*/ 309397 h 3614056"/>
-              <a:gd name="connsiteX10" fmla="*/ 1247302 w 2089376"/>
-              <a:gd name="connsiteY10" fmla="*/ 309397 h 3614056"/>
-              <a:gd name="connsiteX11" fmla="*/ 1289936 w 2089376"/>
-              <a:gd name="connsiteY11" fmla="*/ 369650 h 3614056"/>
-              <a:gd name="connsiteX12" fmla="*/ 1247302 w 2089376"/>
-              <a:gd name="connsiteY12" fmla="*/ 429903 h 3614056"/>
-              <a:gd name="connsiteX13" fmla="*/ 889115 w 2089376"/>
-              <a:gd name="connsiteY13" fmla="*/ 429903 h 3614056"/>
-              <a:gd name="connsiteX14" fmla="*/ 846480 w 2089376"/>
-              <a:gd name="connsiteY14" fmla="*/ 369650 h 3614056"/>
-              <a:gd name="connsiteX15" fmla="*/ 889115 w 2089376"/>
-              <a:gd name="connsiteY15" fmla="*/ 309397 h 3614056"/>
-              <a:gd name="connsiteX16" fmla="*/ 176468 w 2089376"/>
-              <a:gd name="connsiteY16" fmla="*/ 738905 h 3614056"/>
-              <a:gd name="connsiteX17" fmla="*/ 1959892 w 2089376"/>
-              <a:gd name="connsiteY17" fmla="*/ 738905 h 3614056"/>
-              <a:gd name="connsiteX18" fmla="*/ 1959892 w 2089376"/>
-              <a:gd name="connsiteY18" fmla="*/ 2875208 h 3614056"/>
-              <a:gd name="connsiteX19" fmla="*/ 176468 w 2089376"/>
-              <a:gd name="connsiteY19" fmla="*/ 2875208 h 3614056"/>
-              <a:gd name="connsiteX20" fmla="*/ 176468 w 2089376"/>
-              <a:gd name="connsiteY20" fmla="*/ 738905 h 3614056"/>
-              <a:gd name="connsiteX21" fmla="*/ 1068180 w 2089376"/>
-              <a:gd name="connsiteY21" fmla="*/ 3045747 h 3614056"/>
-              <a:gd name="connsiteX22" fmla="*/ 1068180 w 2089376"/>
-              <a:gd name="connsiteY22" fmla="*/ 3045747 h 3614056"/>
-              <a:gd name="connsiteX23" fmla="*/ 1267066 w 2089376"/>
-              <a:gd name="connsiteY23" fmla="*/ 3244633 h 3614056"/>
-              <a:gd name="connsiteX24" fmla="*/ 1267066 w 2089376"/>
-              <a:gd name="connsiteY24" fmla="*/ 3244633 h 3614056"/>
-              <a:gd name="connsiteX25" fmla="*/ 1267066 w 2089376"/>
-              <a:gd name="connsiteY25" fmla="*/ 3244633 h 3614056"/>
-              <a:gd name="connsiteX26" fmla="*/ 1267066 w 2089376"/>
-              <a:gd name="connsiteY26" fmla="*/ 3244633 h 3614056"/>
-              <a:gd name="connsiteX27" fmla="*/ 1068180 w 2089376"/>
-              <a:gd name="connsiteY27" fmla="*/ 3443519 h 3614056"/>
-              <a:gd name="connsiteX28" fmla="*/ 1068180 w 2089376"/>
-              <a:gd name="connsiteY28" fmla="*/ 3443519 h 3614056"/>
-              <a:gd name="connsiteX29" fmla="*/ 1068180 w 2089376"/>
-              <a:gd name="connsiteY29" fmla="*/ 3443519 h 3614056"/>
-              <a:gd name="connsiteX30" fmla="*/ 1068180 w 2089376"/>
-              <a:gd name="connsiteY30" fmla="*/ 3443519 h 3614056"/>
-              <a:gd name="connsiteX31" fmla="*/ 869294 w 2089376"/>
-              <a:gd name="connsiteY31" fmla="*/ 3244633 h 3614056"/>
-              <a:gd name="connsiteX32" fmla="*/ 869294 w 2089376"/>
-              <a:gd name="connsiteY32" fmla="*/ 3244633 h 3614056"/>
-              <a:gd name="connsiteX33" fmla="*/ 869294 w 2089376"/>
-              <a:gd name="connsiteY33" fmla="*/ 3244633 h 3614056"/>
-              <a:gd name="connsiteX34" fmla="*/ 869294 w 2089376"/>
-              <a:gd name="connsiteY34" fmla="*/ 3244633 h 3614056"/>
-              <a:gd name="connsiteX35" fmla="*/ 1068180 w 2089376"/>
-              <a:gd name="connsiteY35" fmla="*/ 3045747 h 3614056"/>
-              <a:gd name="connsiteX36" fmla="*/ 1068180 w 2089376"/>
-              <a:gd name="connsiteY36" fmla="*/ 3045747 h 3614056"/>
-              <a:gd name="connsiteX37" fmla="*/ 1068180 w 2089376"/>
-              <a:gd name="connsiteY37" fmla="*/ 3045747 h 3614056"/>
-            </a:gdLst>
-            <a:ahLst/>
-            <a:cxnLst>
-              <a:cxn ang="0">
-                <a:pos x="connsiteX0" y="connsiteY0"/>
-              </a:cxn>
-              <a:cxn ang="0">
-                <a:pos x="connsiteX1" y="connsiteY1"/>
-              </a:cxn>
-              <a:cxn ang="0">
-                <a:pos x="connsiteX2" y="connsiteY2"/>
-              </a:cxn>
-              <a:cxn ang="0">
-                <a:pos x="connsiteX3" y="connsiteY3"/>
-              </a:cxn>
-              <a:cxn ang="0">
-                <a:pos x="connsiteX4" y="connsiteY4"/>
-              </a:cxn>
-              <a:cxn ang="0">
-                <a:pos x="connsiteX5" y="connsiteY5"/>
-              </a:cxn>
-              <a:cxn ang="0">
-                <a:pos x="connsiteX6" y="connsiteY6"/>
-              </a:cxn>
-              <a:cxn ang="0">
-                <a:pos x="connsiteX7" y="connsiteY7"/>
-              </a:cxn>
-              <a:cxn ang="0">
-                <a:pos x="connsiteX8" y="connsiteY8"/>
-              </a:cxn>
-              <a:cxn ang="0">
-                <a:pos x="connsiteX9" y="connsiteY9"/>
-              </a:cxn>
-              <a:cxn ang="0">
-                <a:pos x="connsiteX10" y="connsiteY10"/>
-              </a:cxn>
-              <a:cxn ang="0">
-                <a:pos x="connsiteX11" y="connsiteY11"/>
-              </a:cxn>
-              <a:cxn ang="0">
-                <a:pos x="connsiteX12" y="connsiteY12"/>
-              </a:cxn>
-              <a:cxn ang="0">
-                <a:pos x="connsiteX13" y="connsiteY13"/>
-              </a:cxn>
-              <a:cxn ang="0">
-                <a:pos x="connsiteX14" y="connsiteY14"/>
-              </a:cxn>
-              <a:cxn ang="0">
-                <a:pos x="connsiteX15" y="connsiteY15"/>
-              </a:cxn>
-              <a:cxn ang="0">
-                <a:pos x="connsiteX16" y="connsiteY16"/>
-              </a:cxn>
-              <a:cxn ang="0">
-                <a:pos x="connsiteX17" y="connsiteY17"/>
-              </a:cxn>
-              <a:cxn ang="0">
-                <a:pos x="connsiteX18" y="connsiteY18"/>
-              </a:cxn>
-              <a:cxn ang="0">
-                <a:pos x="connsiteX19" y="connsiteY19"/>
-              </a:cxn>
-              <a:cxn ang="0">
-                <a:pos x="connsiteX20" y="connsiteY20"/>
-              </a:cxn>
-              <a:cxn ang="0">
-                <a:pos x="connsiteX21" y="connsiteY21"/>
-              </a:cxn>
-              <a:cxn ang="0">
-                <a:pos x="connsiteX22" y="connsiteY22"/>
-              </a:cxn>
-              <a:cxn ang="0">
-                <a:pos x="connsiteX23" y="connsiteY23"/>
-              </a:cxn>
-              <a:cxn ang="0">
-                <a:pos x="connsiteX24" y="connsiteY24"/>
-              </a:cxn>
-              <a:cxn ang="0">
-                <a:pos x="connsiteX25" y="connsiteY25"/>
-              </a:cxn>
-              <a:cxn ang="0">
-                <a:pos x="connsiteX26" y="connsiteY26"/>
-              </a:cxn>
-              <a:cxn ang="0">
-                <a:pos x="connsiteX27" y="connsiteY27"/>
-              </a:cxn>
-              <a:cxn ang="0">
-                <a:pos x="connsiteX28" y="connsiteY28"/>
-              </a:cxn>
-              <a:cxn ang="0">
-                <a:pos x="connsiteX29" y="connsiteY29"/>
-              </a:cxn>
-              <a:cxn ang="0">
-                <a:pos x="connsiteX30" y="connsiteY30"/>
-              </a:cxn>
-              <a:cxn ang="0">
-                <a:pos x="connsiteX31" y="connsiteY31"/>
-              </a:cxn>
-              <a:cxn ang="0">
-                <a:pos x="connsiteX32" y="connsiteY32"/>
-              </a:cxn>
-              <a:cxn ang="0">
-                <a:pos x="connsiteX33" y="connsiteY33"/>
-              </a:cxn>
-              <a:cxn ang="0">
-                <a:pos x="connsiteX34" y="connsiteY34"/>
-              </a:cxn>
-              <a:cxn ang="0">
-                <a:pos x="connsiteX35" y="connsiteY35"/>
-              </a:cxn>
-              <a:cxn ang="0">
-                <a:pos x="connsiteX36" y="connsiteY36"/>
-              </a:cxn>
-              <a:cxn ang="0">
-                <a:pos x="connsiteX37" y="connsiteY37"/>
-              </a:cxn>
-            </a:cxnLst>
-            <a:rect l="l" t="t" r="r" b="b"/>
-            <a:pathLst>
-              <a:path w="2089376" h="3614056">
-                <a:moveTo>
-                  <a:pt x="321256" y="0"/>
-                </a:moveTo>
-                <a:cubicBezTo>
-                  <a:pt x="144562" y="0"/>
-                  <a:pt x="0" y="144562"/>
-                  <a:pt x="0" y="321256"/>
-                </a:cubicBezTo>
-                <a:lnTo>
-                  <a:pt x="0" y="3292801"/>
-                </a:lnTo>
-                <a:cubicBezTo>
-                  <a:pt x="0" y="3469495"/>
-                  <a:pt x="144562" y="3614057"/>
-                  <a:pt x="321256" y="3614057"/>
-                </a:cubicBezTo>
-                <a:lnTo>
-                  <a:pt x="1815047" y="3614057"/>
-                </a:lnTo>
-                <a:cubicBezTo>
-                  <a:pt x="1991741" y="3614057"/>
-                  <a:pt x="2136303" y="3469495"/>
-                  <a:pt x="2136303" y="3292801"/>
-                </a:cubicBezTo>
-                <a:lnTo>
-                  <a:pt x="2136303" y="321256"/>
-                </a:lnTo>
-                <a:cubicBezTo>
-                  <a:pt x="2136303" y="144562"/>
-                  <a:pt x="1991741" y="0"/>
-                  <a:pt x="1815047" y="0"/>
-                </a:cubicBezTo>
-                <a:lnTo>
-                  <a:pt x="321256" y="0"/>
-                </a:lnTo>
-                <a:close/>
-                <a:moveTo>
-                  <a:pt x="889115" y="309397"/>
-                </a:moveTo>
-                <a:lnTo>
-                  <a:pt x="1247302" y="309397"/>
-                </a:lnTo>
-                <a:cubicBezTo>
-                  <a:pt x="1270849" y="309397"/>
-                  <a:pt x="1289936" y="336390"/>
-                  <a:pt x="1289936" y="369650"/>
-                </a:cubicBezTo>
-                <a:cubicBezTo>
-                  <a:pt x="1289936" y="402911"/>
-                  <a:pt x="1270849" y="429903"/>
-                  <a:pt x="1247302" y="429903"/>
-                </a:cubicBezTo>
-                <a:lnTo>
-                  <a:pt x="889115" y="429903"/>
-                </a:lnTo>
-                <a:cubicBezTo>
-                  <a:pt x="865567" y="429903"/>
-                  <a:pt x="846480" y="402911"/>
-                  <a:pt x="846480" y="369650"/>
-                </a:cubicBezTo>
-                <a:cubicBezTo>
-                  <a:pt x="846480" y="336390"/>
-                  <a:pt x="865567" y="309397"/>
-                  <a:pt x="889115" y="309397"/>
-                </a:cubicBezTo>
-                <a:close/>
-                <a:moveTo>
-                  <a:pt x="176468" y="738905"/>
-                </a:moveTo>
-                <a:lnTo>
-                  <a:pt x="1959892" y="738905"/>
-                </a:lnTo>
-                <a:lnTo>
-                  <a:pt x="1959892" y="2875208"/>
-                </a:lnTo>
-                <a:lnTo>
-                  <a:pt x="176468" y="2875208"/>
-                </a:lnTo>
-                <a:lnTo>
-                  <a:pt x="176468" y="738905"/>
-                </a:lnTo>
-                <a:close/>
-                <a:moveTo>
-                  <a:pt x="1068180" y="3045747"/>
-                </a:moveTo>
-                <a:cubicBezTo>
-                  <a:pt x="1068180" y="3045747"/>
-                  <a:pt x="1068180" y="3045747"/>
-                  <a:pt x="1068180" y="3045747"/>
-                </a:cubicBezTo>
-                <a:cubicBezTo>
-                  <a:pt x="1178013" y="3045747"/>
-                  <a:pt x="1267066" y="3134799"/>
-                  <a:pt x="1267066" y="3244633"/>
-                </a:cubicBezTo>
-                <a:cubicBezTo>
-                  <a:pt x="1267066" y="3244633"/>
-                  <a:pt x="1267066" y="3244633"/>
-                  <a:pt x="1267066" y="3244633"/>
-                </a:cubicBezTo>
-                <a:lnTo>
-                  <a:pt x="1267066" y="3244633"/>
-                </a:lnTo>
-                <a:cubicBezTo>
-                  <a:pt x="1267066" y="3244633"/>
-                  <a:pt x="1267066" y="3244633"/>
-                  <a:pt x="1267066" y="3244633"/>
-                </a:cubicBezTo>
-                <a:cubicBezTo>
-                  <a:pt x="1267066" y="3354466"/>
-                  <a:pt x="1178013" y="3443519"/>
-                  <a:pt x="1068180" y="3443519"/>
-                </a:cubicBezTo>
-                <a:cubicBezTo>
-                  <a:pt x="1068180" y="3443519"/>
-                  <a:pt x="1068180" y="3443519"/>
-                  <a:pt x="1068180" y="3443519"/>
-                </a:cubicBezTo>
-                <a:lnTo>
-                  <a:pt x="1068180" y="3443519"/>
-                </a:lnTo>
-                <a:cubicBezTo>
-                  <a:pt x="1068180" y="3443519"/>
-                  <a:pt x="1068180" y="3443519"/>
-                  <a:pt x="1068180" y="3443519"/>
-                </a:cubicBezTo>
-                <a:cubicBezTo>
-                  <a:pt x="958346" y="3443519"/>
-                  <a:pt x="869294" y="3354466"/>
-                  <a:pt x="869294" y="3244633"/>
-                </a:cubicBezTo>
-                <a:cubicBezTo>
-                  <a:pt x="869294" y="3244633"/>
-                  <a:pt x="869294" y="3244633"/>
-                  <a:pt x="869294" y="3244633"/>
-                </a:cubicBezTo>
-                <a:lnTo>
-                  <a:pt x="869294" y="3244633"/>
-                </a:lnTo>
-                <a:cubicBezTo>
-                  <a:pt x="869294" y="3244633"/>
-                  <a:pt x="869294" y="3244633"/>
-                  <a:pt x="869294" y="3244633"/>
-                </a:cubicBezTo>
-                <a:cubicBezTo>
-                  <a:pt x="869294" y="3134799"/>
-                  <a:pt x="958346" y="3045747"/>
-                  <a:pt x="1068180" y="3045747"/>
-                </a:cubicBezTo>
-                <a:cubicBezTo>
-                  <a:pt x="1068180" y="3045747"/>
-                  <a:pt x="1068180" y="3045747"/>
-                  <a:pt x="1068180" y="3045747"/>
-                </a:cubicBezTo>
-                <a:lnTo>
-                  <a:pt x="1068180" y="3045747"/>
-                </a:lnTo>
-                <a:close/>
-              </a:path>
-            </a:pathLst>
-          </a:custGeom>
-          <a:solidFill>
-            <a:srgbClr val="CDCDCD"/>
-          </a:solidFill>
-          <a:ln w="56406" cap="flat">
-            <a:noFill/>
-            <a:prstDash val="solid"/>
-            <a:miter/>
-          </a:ln>
-        </p:spPr>
-        <p:txBody>
-          <a:bodyPr rtlCol="0" anchor="ctr"/>
-          <a:lstStyle/>
-          <a:p>
-            <a:pPr defTabSz="406420"/>
-            <a:endParaRPr lang="en-US" sz="1600">
-              <a:solidFill>
-                <a:prstClr val="white">
-                  <a:lumMod val="85000"/>
-                </a:prstClr>
-              </a:solidFill>
-              <a:latin typeface="Calibri" panose="020F0502020204030204"/>
-            </a:endParaRPr>
-          </a:p>
-        </p:txBody>
-      </p:sp>
-      <p:sp>
-        <p:nvSpPr>
-          <p:cNvPr id="19" name="TextBox 18">
-            <a:extLst>
-              <a:ext uri="{FF2B5EF4-FFF2-40B4-BE49-F238E27FC236}">
-                <a16:creationId xmlns:a16="http://schemas.microsoft.com/office/drawing/2014/main" id="{315520EB-0F65-403D-A973-B17B2A4C2E9D}"/>
-              </a:ext>
-            </a:extLst>
-          </p:cNvPr>
-          <p:cNvSpPr txBox="1"/>
-          <p:nvPr/>
-        </p:nvSpPr>
-        <p:spPr>
-          <a:xfrm>
-            <a:off x="17786944" y="27163399"/>
-            <a:ext cx="7179897" cy="1405898"/>
-          </a:xfrm>
-          <a:prstGeom prst="rect">
-            <a:avLst/>
-          </a:prstGeom>
-          <a:noFill/>
-        </p:spPr>
-        <p:txBody>
-          <a:bodyPr wrap="square" rtlCol="0">
-            <a:spAutoFit/>
-          </a:bodyPr>
-          <a:lstStyle/>
-          <a:p>
-            <a:pPr defTabSz="406420"/>
-            <a:r>
-              <a:rPr lang="en-US" sz="4268" dirty="0">
-                <a:solidFill>
-                  <a:srgbClr val="CDCDCD"/>
-                </a:solidFill>
-                <a:latin typeface="Lato Black" panose="020F0A02020204030203" pitchFamily="34" charset="0"/>
-                <a:cs typeface="Arial" panose="020B0604020202020204" pitchFamily="34" charset="0"/>
-              </a:rPr>
-              <a:t>Take a picture</a:t>
-            </a:r>
-            <a:r>
-              <a:rPr lang="en-US" sz="4268" dirty="0">
-                <a:solidFill>
-                  <a:srgbClr val="CDCDCD"/>
-                </a:solidFill>
-                <a:latin typeface="Lato" panose="020F0502020204030203" pitchFamily="34" charset="0"/>
-                <a:cs typeface="Arial" panose="020B0604020202020204" pitchFamily="34" charset="0"/>
-              </a:rPr>
-              <a:t> to </a:t>
-            </a:r>
-            <a:br>
-              <a:rPr lang="en-US" sz="4268" dirty="0">
-                <a:solidFill>
-                  <a:srgbClr val="CDCDCD"/>
-                </a:solidFill>
-                <a:latin typeface="Lato" panose="020F0502020204030203" pitchFamily="34" charset="0"/>
-                <a:cs typeface="Arial" panose="020B0604020202020204" pitchFamily="34" charset="0"/>
-              </a:rPr>
-            </a:br>
-            <a:r>
-              <a:rPr lang="en-US" sz="4268" dirty="0">
-                <a:solidFill>
-                  <a:srgbClr val="CDCDCD"/>
-                </a:solidFill>
-                <a:latin typeface="Lato Black" panose="020F0A02020204030203" pitchFamily="34" charset="0"/>
-                <a:cs typeface="Arial" panose="020B0604020202020204" pitchFamily="34" charset="0"/>
-              </a:rPr>
-              <a:t>download</a:t>
-            </a:r>
-            <a:r>
-              <a:rPr lang="en-US" sz="4268" dirty="0">
-                <a:solidFill>
-                  <a:srgbClr val="CDCDCD"/>
-                </a:solidFill>
-                <a:latin typeface="Lato" panose="020F0502020204030203" pitchFamily="34" charset="0"/>
-                <a:cs typeface="Arial" panose="020B0604020202020204" pitchFamily="34" charset="0"/>
-              </a:rPr>
-              <a:t> the</a:t>
-            </a:r>
-            <a:r>
-              <a:rPr lang="en-US" sz="4268" b="1" dirty="0">
-                <a:solidFill>
-                  <a:srgbClr val="CDCDCD"/>
-                </a:solidFill>
-                <a:latin typeface="Lato" panose="020F0502020204030203" pitchFamily="34" charset="0"/>
-                <a:cs typeface="Arial" panose="020B0604020202020204" pitchFamily="34" charset="0"/>
-              </a:rPr>
-              <a:t> </a:t>
-            </a:r>
-            <a:r>
-              <a:rPr lang="en-US" sz="4268" dirty="0">
-                <a:solidFill>
-                  <a:srgbClr val="CDCDCD"/>
-                </a:solidFill>
-                <a:latin typeface="Lato Black" panose="020F0A02020204030203" pitchFamily="34" charset="0"/>
-                <a:cs typeface="Arial" panose="020B0604020202020204" pitchFamily="34" charset="0"/>
-              </a:rPr>
-              <a:t>full paper</a:t>
             </a:r>
           </a:p>
         </p:txBody>
@@ -5096,51 +4584,6 @@
           </a:p>
         </p:txBody>
       </p:sp>
-      <p:cxnSp>
-        <p:nvCxnSpPr>
-          <p:cNvPr id="24" name="Straight Arrow Connector 23">
-            <a:extLst>
-              <a:ext uri="{FF2B5EF4-FFF2-40B4-BE49-F238E27FC236}">
-                <a16:creationId xmlns:a16="http://schemas.microsoft.com/office/drawing/2014/main" id="{32B70FBA-A2DF-453C-9792-CA6E8DB0D343}"/>
-              </a:ext>
-            </a:extLst>
-          </p:cNvPr>
-          <p:cNvCxnSpPr>
-            <a:cxnSpLocks/>
-          </p:cNvCxnSpPr>
-          <p:nvPr/>
-        </p:nvCxnSpPr>
-        <p:spPr>
-          <a:xfrm flipH="1">
-            <a:off x="15054376" y="27969942"/>
-            <a:ext cx="1153301" cy="0"/>
-          </a:xfrm>
-          <a:prstGeom prst="straightConnector1">
-            <a:avLst/>
-          </a:prstGeom>
-          <a:ln w="66675">
-            <a:solidFill>
-              <a:schemeClr val="bg1"/>
-            </a:solidFill>
-            <a:prstDash val="sysDot"/>
-            <a:tailEnd type="triangle"/>
-          </a:ln>
-        </p:spPr>
-        <p:style>
-          <a:lnRef idx="1">
-            <a:schemeClr val="accent1"/>
-          </a:lnRef>
-          <a:fillRef idx="0">
-            <a:schemeClr val="accent1"/>
-          </a:fillRef>
-          <a:effectRef idx="0">
-            <a:schemeClr val="accent1"/>
-          </a:effectRef>
-          <a:fontRef idx="minor">
-            <a:schemeClr val="tx1"/>
-          </a:fontRef>
-        </p:style>
-      </p:cxnSp>
       <p:sp>
         <p:nvSpPr>
           <p:cNvPr id="17" name="Graphic 18">
@@ -5538,10 +4981,10 @@
       </p:sp>
       <p:sp>
         <p:nvSpPr>
-          <p:cNvPr id="2" name="Rectangle 1">
+          <p:cNvPr id="4" name="Rectangle 3">
             <a:extLst>
               <a:ext uri="{FF2B5EF4-FFF2-40B4-BE49-F238E27FC236}">
-                <a16:creationId xmlns:a16="http://schemas.microsoft.com/office/drawing/2014/main" id="{ADC988AD-FB82-4850-84BE-0F496EB3BDC0}"/>
+                <a16:creationId xmlns:a16="http://schemas.microsoft.com/office/drawing/2014/main" id="{8526467A-A2D3-38BF-4704-12F9CBD050C1}"/>
               </a:ext>
             </a:extLst>
           </p:cNvPr>
@@ -5550,20 +4993,24 @@
         </p:nvSpPr>
         <p:spPr>
           <a:xfrm>
-            <a:off x="16476203" y="21644280"/>
-            <a:ext cx="21945600" cy="1077218"/>
+            <a:off x="5847765" y="4614638"/>
+            <a:ext cx="2916183" cy="1331775"/>
           </a:xfrm>
           <a:prstGeom prst="rect">
             <a:avLst/>
           </a:prstGeom>
         </p:spPr>
         <p:txBody>
-          <a:bodyPr>
+          <a:bodyPr wrap="none">
             <a:spAutoFit/>
           </a:bodyPr>
           <a:lstStyle/>
           <a:p>
-            <a:pPr defTabSz="406420"/>
+            <a:pPr defTabSz="406420">
+              <a:lnSpc>
+                <a:spcPct val="120000"/>
+              </a:lnSpc>
+            </a:pPr>
             <a:r>
               <a:rPr lang="en-US" sz="3200" dirty="0">
                 <a:solidFill>
@@ -5574,16 +5021,41 @@
                 <a:latin typeface="Lato" panose="020F0502020204030203" pitchFamily="34" charset="0"/>
                 <a:cs typeface="Segoe UI" panose="020B0502040204020203" pitchFamily="34" charset="0"/>
               </a:rPr>
-              <a:t>Visualize your findings with an image, graphic, or a key figure.</a:t>
-            </a:r>
-          </a:p>
-          <a:p>
-            <a:pPr defTabSz="406420"/>
-            <a:endParaRPr lang="en-US" sz="3200" dirty="0">
+              <a:t>Mentor:</a:t>
+            </a:r>
+            <a:r>
+              <a:rPr lang="en-US" sz="3200" b="1" dirty="0">
+                <a:solidFill>
+                  <a:prstClr val="black"/>
+                </a:solidFill>
+                <a:latin typeface="Lato" panose="020F0502020204030203" pitchFamily="34" charset="0"/>
+                <a:cs typeface="Segoe UI" panose="020B0502040204020203" pitchFamily="34" charset="0"/>
+              </a:rPr>
+              <a:t> </a:t>
+            </a:r>
+          </a:p>
+          <a:p>
+            <a:pPr defTabSz="406420">
+              <a:lnSpc>
+                <a:spcPct val="120000"/>
+              </a:lnSpc>
+            </a:pPr>
+            <a:r>
+              <a:rPr lang="en-US" sz="3911" b="1" dirty="0">
+                <a:solidFill>
+                  <a:prstClr val="black"/>
+                </a:solidFill>
+                <a:highlight>
+                  <a:srgbClr val="FFC107"/>
+                </a:highlight>
+                <a:latin typeface="Lato" panose="020F0502020204030203" pitchFamily="34" charset="0"/>
+                <a:cs typeface="Segoe UI" panose="020B0502040204020203" pitchFamily="34" charset="0"/>
+              </a:rPr>
+              <a:t>Brian Toone</a:t>
+            </a:r>
+            <a:endParaRPr lang="en-US" sz="3911" b="1" dirty="0">
               <a:solidFill>
-                <a:prstClr val="white">
-                  <a:lumMod val="50000"/>
-                </a:prstClr>
+                <a:prstClr val="black"/>
               </a:solidFill>
               <a:latin typeface="Lato" panose="020F0502020204030203" pitchFamily="34" charset="0"/>
               <a:cs typeface="Segoe UI" panose="020B0502040204020203" pitchFamily="34" charset="0"/>
@@ -5591,12 +5063,113 @@
           </a:p>
         </p:txBody>
       </p:sp>
+      <p:sp>
+        <p:nvSpPr>
+          <p:cNvPr id="6" name="TextBox 5">
+            <a:extLst>
+              <a:ext uri="{FF2B5EF4-FFF2-40B4-BE49-F238E27FC236}">
+                <a16:creationId xmlns:a16="http://schemas.microsoft.com/office/drawing/2014/main" id="{664565BF-20FE-4BAA-6027-C8EFADB53612}"/>
+              </a:ext>
+            </a:extLst>
+          </p:cNvPr>
+          <p:cNvSpPr txBox="1"/>
+          <p:nvPr/>
+        </p:nvSpPr>
+        <p:spPr>
+          <a:xfrm>
+            <a:off x="36558391" y="25481333"/>
+            <a:ext cx="6682064" cy="1897827"/>
+          </a:xfrm>
+          <a:prstGeom prst="rect">
+            <a:avLst/>
+          </a:prstGeom>
+          <a:noFill/>
+        </p:spPr>
+        <p:txBody>
+          <a:bodyPr wrap="square" rtlCol="0">
+            <a:spAutoFit/>
+          </a:bodyPr>
+          <a:lstStyle/>
+          <a:p>
+            <a:pPr marL="742950" indent="-742950" defTabSz="406420">
+              <a:buFont typeface="+mj-lt"/>
+              <a:buAutoNum type="arabicPeriod"/>
+            </a:pPr>
+            <a:r>
+              <a:rPr lang="en-US" sz="3911" dirty="0" err="1">
+                <a:solidFill>
+                  <a:prstClr val="black"/>
+                </a:solidFill>
+                <a:latin typeface="Lato" panose="020F0502020204030203" pitchFamily="34" charset="0"/>
+                <a:cs typeface="Segoe UI" panose="020B0502040204020203" pitchFamily="34" charset="0"/>
+              </a:rPr>
+              <a:t>mybiketraffic.com</a:t>
+            </a:r>
+            <a:endParaRPr lang="en-US" sz="3911" dirty="0">
+              <a:solidFill>
+                <a:prstClr val="black"/>
+              </a:solidFill>
+              <a:latin typeface="Lato" panose="020F0502020204030203" pitchFamily="34" charset="0"/>
+              <a:cs typeface="Segoe UI" panose="020B0502040204020203" pitchFamily="34" charset="0"/>
+            </a:endParaRPr>
+          </a:p>
+          <a:p>
+            <a:pPr marL="742950" indent="-742950" defTabSz="406420">
+              <a:buFont typeface="+mj-lt"/>
+              <a:buAutoNum type="arabicPeriod"/>
+            </a:pPr>
+            <a:r>
+              <a:rPr lang="en-US" sz="3911" dirty="0" err="1">
+                <a:solidFill>
+                  <a:prstClr val="black"/>
+                </a:solidFill>
+                <a:latin typeface="Lato" panose="020F0502020204030203" pitchFamily="34" charset="0"/>
+                <a:cs typeface="Segoe UI" panose="020B0502040204020203" pitchFamily="34" charset="0"/>
+              </a:rPr>
+              <a:t>react.dev</a:t>
+            </a:r>
+            <a:endParaRPr lang="en-US" sz="3911" dirty="0">
+              <a:solidFill>
+                <a:prstClr val="black"/>
+              </a:solidFill>
+              <a:latin typeface="Lato" panose="020F0502020204030203" pitchFamily="34" charset="0"/>
+              <a:cs typeface="Segoe UI" panose="020B0502040204020203" pitchFamily="34" charset="0"/>
+            </a:endParaRPr>
+          </a:p>
+          <a:p>
+            <a:pPr marL="742950" indent="-742950" defTabSz="406420">
+              <a:buFont typeface="+mj-lt"/>
+              <a:buAutoNum type="arabicPeriod"/>
+            </a:pPr>
+            <a:r>
+              <a:rPr lang="en-US" sz="3911" dirty="0" err="1">
+                <a:solidFill>
+                  <a:prstClr val="black"/>
+                </a:solidFill>
+                <a:latin typeface="Lato" panose="020F0502020204030203" pitchFamily="34" charset="0"/>
+                <a:cs typeface="Segoe UI" panose="020B0502040204020203" pitchFamily="34" charset="0"/>
+              </a:rPr>
+              <a:t>Etc</a:t>
+            </a:r>
+            <a:r>
+              <a:rPr lang="en-US" sz="3911" dirty="0">
+                <a:solidFill>
+                  <a:prstClr val="black"/>
+                </a:solidFill>
+                <a:latin typeface="Lato" panose="020F0502020204030203" pitchFamily="34" charset="0"/>
+                <a:cs typeface="Segoe UI" panose="020B0502040204020203" pitchFamily="34" charset="0"/>
+              </a:rPr>
+              <a:t>…….</a:t>
+            </a:r>
+          </a:p>
+        </p:txBody>
+      </p:sp>
       <p:pic>
         <p:nvPicPr>
-          <p:cNvPr id="14" name="Graphic 13">
+          <p:cNvPr id="11" name="Picture 10" descr="A screen shot of a phone&#10;&#10;AI-generated content may be incorrect.">
             <a:extLst>
               <a:ext uri="{FF2B5EF4-FFF2-40B4-BE49-F238E27FC236}">
-                <a16:creationId xmlns:a16="http://schemas.microsoft.com/office/drawing/2014/main" id="{8469FA09-6407-4240-A302-A9681C46F182}"/>
+                <a16:creationId xmlns:a16="http://schemas.microsoft.com/office/drawing/2014/main" id="{A5619CBC-1F5A-C3D7-771B-376C1094269E}"/>
               </a:ext>
             </a:extLst>
           </p:cNvPr>
@@ -5611,8 +5184,131 @@
               <a:ext uri="{28A0092B-C50C-407E-A947-70E740481C1C}">
                 <a14:useLocalDpi xmlns:a14="http://schemas.microsoft.com/office/drawing/2010/main" val="0"/>
               </a:ext>
-              <a:ext uri="{96DAC541-7B7A-43D3-8B79-37D633B846F1}">
-                <asvg:svgBlip xmlns:asvg="http://schemas.microsoft.com/office/drawing/2016/SVG/main" r:embed="rId4"/>
+            </a:extLst>
+          </a:blip>
+          <a:stretch>
+            <a:fillRect/>
+          </a:stretch>
+        </p:blipFill>
+        <p:spPr>
+          <a:xfrm>
+            <a:off x="23770544" y="-560752"/>
+            <a:ext cx="10285789" cy="19373918"/>
+          </a:xfrm>
+          <a:prstGeom prst="rect">
+            <a:avLst/>
+          </a:prstGeom>
+        </p:spPr>
+      </p:pic>
+      <p:sp>
+        <p:nvSpPr>
+          <p:cNvPr id="13" name="AutoShape 2" descr="Image">
+            <a:extLst>
+              <a:ext uri="{FF2B5EF4-FFF2-40B4-BE49-F238E27FC236}">
+                <a16:creationId xmlns:a16="http://schemas.microsoft.com/office/drawing/2014/main" id="{8857F119-F395-A695-D31C-944C8E24FD7A}"/>
+              </a:ext>
+            </a:extLst>
+          </p:cNvPr>
+          <p:cNvSpPr>
+            <a:spLocks noChangeAspect="1" noChangeArrowheads="1"/>
+          </p:cNvSpPr>
+          <p:nvPr/>
+        </p:nvSpPr>
+        <p:spPr bwMode="auto">
+          <a:xfrm>
+            <a:off x="21793200" y="16306800"/>
+            <a:ext cx="304800" cy="304800"/>
+          </a:xfrm>
+          <a:prstGeom prst="rect">
+            <a:avLst/>
+          </a:prstGeom>
+          <a:noFill/>
+          <a:extLst>
+            <a:ext uri="{909E8E84-426E-40DD-AFC4-6F175D3DCCD1}">
+              <a14:hiddenFill xmlns:a14="http://schemas.microsoft.com/office/drawing/2010/main">
+                <a:solidFill>
+                  <a:srgbClr val="FFFFFF"/>
+                </a:solidFill>
+              </a14:hiddenFill>
+            </a:ext>
+          </a:extLst>
+        </p:spPr>
+        <p:txBody>
+          <a:bodyPr vert="horz" wrap="square" lIns="91440" tIns="45720" rIns="91440" bIns="45720" numCol="1" anchor="t" anchorCtr="0" compatLnSpc="1">
+            <a:prstTxWarp prst="textNoShape">
+              <a:avLst/>
+            </a:prstTxWarp>
+          </a:bodyPr>
+          <a:lstStyle/>
+          <a:p>
+            <a:endParaRPr lang="en-US"/>
+          </a:p>
+        </p:txBody>
+      </p:sp>
+      <p:sp>
+        <p:nvSpPr>
+          <p:cNvPr id="15" name="AutoShape 4">
+            <a:extLst>
+              <a:ext uri="{FF2B5EF4-FFF2-40B4-BE49-F238E27FC236}">
+                <a16:creationId xmlns:a16="http://schemas.microsoft.com/office/drawing/2014/main" id="{D7D6A3D6-8D4B-E5FC-4AFF-7005157C9A06}"/>
+              </a:ext>
+            </a:extLst>
+          </p:cNvPr>
+          <p:cNvSpPr>
+            <a:spLocks noChangeAspect="1" noChangeArrowheads="1"/>
+          </p:cNvSpPr>
+          <p:nvPr/>
+        </p:nvSpPr>
+        <p:spPr bwMode="auto">
+          <a:xfrm>
+            <a:off x="18483263" y="13568363"/>
+            <a:ext cx="6924675" cy="5781675"/>
+          </a:xfrm>
+          <a:prstGeom prst="rect">
+            <a:avLst/>
+          </a:prstGeom>
+          <a:noFill/>
+          <a:extLst>
+            <a:ext uri="{909E8E84-426E-40DD-AFC4-6F175D3DCCD1}">
+              <a14:hiddenFill xmlns:a14="http://schemas.microsoft.com/office/drawing/2010/main">
+                <a:solidFill>
+                  <a:srgbClr val="FFFFFF"/>
+                </a:solidFill>
+              </a14:hiddenFill>
+            </a:ext>
+          </a:extLst>
+        </p:spPr>
+        <p:txBody>
+          <a:bodyPr vert="horz" wrap="square" lIns="91440" tIns="45720" rIns="91440" bIns="45720" numCol="1" anchor="t" anchorCtr="0" compatLnSpc="1">
+            <a:prstTxWarp prst="textNoShape">
+              <a:avLst/>
+            </a:prstTxWarp>
+          </a:bodyPr>
+          <a:lstStyle/>
+          <a:p>
+            <a:endParaRPr lang="en-US"/>
+          </a:p>
+        </p:txBody>
+      </p:sp>
+      <p:pic>
+        <p:nvPicPr>
+          <p:cNvPr id="23" name="Picture 22" descr="A screen shot of a computer program&#10;&#10;AI-generated content may be incorrect.">
+            <a:extLst>
+              <a:ext uri="{FF2B5EF4-FFF2-40B4-BE49-F238E27FC236}">
+                <a16:creationId xmlns:a16="http://schemas.microsoft.com/office/drawing/2014/main" id="{48D57E66-D43C-FCEE-CFD0-A66775EC4022}"/>
+              </a:ext>
+            </a:extLst>
+          </p:cNvPr>
+          <p:cNvPicPr>
+            <a:picLocks noChangeAspect="1"/>
+          </p:cNvPicPr>
+          <p:nvPr/>
+        </p:nvPicPr>
+        <p:blipFill>
+          <a:blip r:embed="rId4">
+            <a:extLst>
+              <a:ext uri="{28A0092B-C50C-407E-A947-70E740481C1C}">
+                <a14:useLocalDpi xmlns:a14="http://schemas.microsoft.com/office/drawing/2010/main" val="0"/>
               </a:ext>
             </a:extLst>
           </a:blip>
@@ -5622,235 +5318,14 @@
         </p:blipFill>
         <p:spPr>
           <a:xfrm>
-            <a:off x="11537073" y="26360290"/>
-            <a:ext cx="3362721" cy="3362721"/>
+            <a:off x="12359992" y="18619618"/>
+            <a:ext cx="14662711" cy="12237580"/>
           </a:xfrm>
           <a:prstGeom prst="rect">
             <a:avLst/>
           </a:prstGeom>
         </p:spPr>
       </p:pic>
-      <p:pic>
-        <p:nvPicPr>
-          <p:cNvPr id="27" name="Graphic 26">
-            <a:extLst>
-              <a:ext uri="{FF2B5EF4-FFF2-40B4-BE49-F238E27FC236}">
-                <a16:creationId xmlns:a16="http://schemas.microsoft.com/office/drawing/2014/main" id="{B62BF9C0-8774-4458-8210-ACA4788001C5}"/>
-              </a:ext>
-            </a:extLst>
-          </p:cNvPr>
-          <p:cNvPicPr>
-            <a:picLocks noChangeAspect="1"/>
-          </p:cNvPicPr>
-          <p:nvPr/>
-        </p:nvPicPr>
-        <p:blipFill>
-          <a:blip r:embed="rId5">
-            <a:extLst>
-              <a:ext uri="{96DAC541-7B7A-43D3-8B79-37D633B846F1}">
-                <asvg:svgBlip xmlns:asvg="http://schemas.microsoft.com/office/drawing/2016/SVG/main" r:embed="rId6"/>
-              </a:ext>
-            </a:extLst>
-          </a:blip>
-          <a:stretch>
-            <a:fillRect/>
-          </a:stretch>
-        </p:blipFill>
-        <p:spPr>
-          <a:xfrm>
-            <a:off x="16670312" y="13702751"/>
-            <a:ext cx="10865504" cy="7243669"/>
-          </a:xfrm>
-          <a:prstGeom prst="rect">
-            <a:avLst/>
-          </a:prstGeom>
-        </p:spPr>
-      </p:pic>
-      <p:sp>
-        <p:nvSpPr>
-          <p:cNvPr id="4" name="Rectangle 3">
-            <a:extLst>
-              <a:ext uri="{FF2B5EF4-FFF2-40B4-BE49-F238E27FC236}">
-                <a16:creationId xmlns:a16="http://schemas.microsoft.com/office/drawing/2014/main" id="{8526467A-A2D3-38BF-4704-12F9CBD050C1}"/>
-              </a:ext>
-            </a:extLst>
-          </p:cNvPr>
-          <p:cNvSpPr/>
-          <p:nvPr/>
-        </p:nvSpPr>
-        <p:spPr>
-          <a:xfrm>
-            <a:off x="5847765" y="4614638"/>
-            <a:ext cx="2916183" cy="1331775"/>
-          </a:xfrm>
-          <a:prstGeom prst="rect">
-            <a:avLst/>
-          </a:prstGeom>
-        </p:spPr>
-        <p:txBody>
-          <a:bodyPr wrap="none">
-            <a:spAutoFit/>
-          </a:bodyPr>
-          <a:lstStyle/>
-          <a:p>
-            <a:pPr defTabSz="406420">
-              <a:lnSpc>
-                <a:spcPct val="120000"/>
-              </a:lnSpc>
-            </a:pPr>
-            <a:r>
-              <a:rPr lang="en-US" sz="3200" dirty="0">
-                <a:solidFill>
-                  <a:prstClr val="white">
-                    <a:lumMod val="50000"/>
-                  </a:prstClr>
-                </a:solidFill>
-                <a:latin typeface="Lato" panose="020F0502020204030203" pitchFamily="34" charset="0"/>
-                <a:cs typeface="Segoe UI" panose="020B0502040204020203" pitchFamily="34" charset="0"/>
-              </a:rPr>
-              <a:t>Mentor:</a:t>
-            </a:r>
-            <a:r>
-              <a:rPr lang="en-US" sz="3200" b="1" dirty="0">
-                <a:solidFill>
-                  <a:prstClr val="black"/>
-                </a:solidFill>
-                <a:latin typeface="Lato" panose="020F0502020204030203" pitchFamily="34" charset="0"/>
-                <a:cs typeface="Segoe UI" panose="020B0502040204020203" pitchFamily="34" charset="0"/>
-              </a:rPr>
-              <a:t> </a:t>
-            </a:r>
-          </a:p>
-          <a:p>
-            <a:pPr defTabSz="406420">
-              <a:lnSpc>
-                <a:spcPct val="120000"/>
-              </a:lnSpc>
-            </a:pPr>
-            <a:r>
-              <a:rPr lang="en-US" sz="3911" b="1" dirty="0">
-                <a:solidFill>
-                  <a:prstClr val="black"/>
-                </a:solidFill>
-                <a:highlight>
-                  <a:srgbClr val="FFC107"/>
-                </a:highlight>
-                <a:latin typeface="Lato" panose="020F0502020204030203" pitchFamily="34" charset="0"/>
-                <a:cs typeface="Segoe UI" panose="020B0502040204020203" pitchFamily="34" charset="0"/>
-              </a:rPr>
-              <a:t>Brian Toone</a:t>
-            </a:r>
-            <a:endParaRPr lang="en-US" sz="3911" b="1" dirty="0">
-              <a:solidFill>
-                <a:prstClr val="black"/>
-              </a:solidFill>
-              <a:latin typeface="Lato" panose="020F0502020204030203" pitchFamily="34" charset="0"/>
-              <a:cs typeface="Segoe UI" panose="020B0502040204020203" pitchFamily="34" charset="0"/>
-            </a:endParaRPr>
-          </a:p>
-        </p:txBody>
-      </p:sp>
-      <p:sp>
-        <p:nvSpPr>
-          <p:cNvPr id="6" name="TextBox 5">
-            <a:extLst>
-              <a:ext uri="{FF2B5EF4-FFF2-40B4-BE49-F238E27FC236}">
-                <a16:creationId xmlns:a16="http://schemas.microsoft.com/office/drawing/2014/main" id="{664565BF-20FE-4BAA-6027-C8EFADB53612}"/>
-              </a:ext>
-            </a:extLst>
-          </p:cNvPr>
-          <p:cNvSpPr txBox="1"/>
-          <p:nvPr/>
-        </p:nvSpPr>
-        <p:spPr>
-          <a:xfrm>
-            <a:off x="36558391" y="25481333"/>
-            <a:ext cx="6682064" cy="1897827"/>
-          </a:xfrm>
-          <a:prstGeom prst="rect">
-            <a:avLst/>
-          </a:prstGeom>
-          <a:noFill/>
-        </p:spPr>
-        <p:txBody>
-          <a:bodyPr wrap="square" rtlCol="0">
-            <a:spAutoFit/>
-          </a:bodyPr>
-          <a:lstStyle/>
-          <a:p>
-            <a:pPr marL="742950" indent="-742950" defTabSz="406420">
-              <a:buFont typeface="+mj-lt"/>
-              <a:buAutoNum type="arabicPeriod"/>
-            </a:pPr>
-            <a:r>
-              <a:rPr lang="en-US" sz="3911" dirty="0" err="1">
-                <a:solidFill>
-                  <a:prstClr val="black"/>
-                </a:solidFill>
-                <a:latin typeface="Lato" panose="020F0502020204030203" pitchFamily="34" charset="0"/>
-                <a:cs typeface="Segoe UI" panose="020B0502040204020203" pitchFamily="34" charset="0"/>
-              </a:rPr>
-              <a:t>mybiketraffic.com</a:t>
-            </a:r>
-            <a:endParaRPr lang="en-US" sz="3911" dirty="0">
-              <a:solidFill>
-                <a:prstClr val="black"/>
-              </a:solidFill>
-              <a:latin typeface="Lato" panose="020F0502020204030203" pitchFamily="34" charset="0"/>
-              <a:cs typeface="Segoe UI" panose="020B0502040204020203" pitchFamily="34" charset="0"/>
-            </a:endParaRPr>
-          </a:p>
-          <a:p>
-            <a:pPr marL="742950" indent="-742950" defTabSz="406420">
-              <a:buFont typeface="+mj-lt"/>
-              <a:buAutoNum type="arabicPeriod"/>
-            </a:pPr>
-            <a:r>
-              <a:rPr lang="en-US" sz="3911" dirty="0" err="1">
-                <a:solidFill>
-                  <a:prstClr val="black"/>
-                </a:solidFill>
-                <a:latin typeface="Lato" panose="020F0502020204030203" pitchFamily="34" charset="0"/>
-                <a:cs typeface="Segoe UI" panose="020B0502040204020203" pitchFamily="34" charset="0"/>
-              </a:rPr>
-              <a:t>react.dev</a:t>
-            </a:r>
-            <a:endParaRPr lang="en-US" sz="3911" dirty="0">
-              <a:solidFill>
-                <a:prstClr val="black"/>
-              </a:solidFill>
-              <a:latin typeface="Lato" panose="020F0502020204030203" pitchFamily="34" charset="0"/>
-              <a:cs typeface="Segoe UI" panose="020B0502040204020203" pitchFamily="34" charset="0"/>
-            </a:endParaRPr>
-          </a:p>
-          <a:p>
-            <a:pPr marL="742950" indent="-742950" defTabSz="406420">
-              <a:buFont typeface="+mj-lt"/>
-              <a:buAutoNum type="arabicPeriod"/>
-            </a:pPr>
-            <a:r>
-              <a:rPr lang="en-US" sz="3911" dirty="0" err="1">
-                <a:solidFill>
-                  <a:prstClr val="black"/>
-                </a:solidFill>
-                <a:latin typeface="Lato" panose="020F0502020204030203" pitchFamily="34" charset="0"/>
-                <a:cs typeface="Segoe UI" panose="020B0502040204020203" pitchFamily="34" charset="0"/>
-              </a:rPr>
-              <a:t>Etc</a:t>
-            </a:r>
-            <a:r>
-              <a:rPr lang="en-US" sz="3911" dirty="0">
-                <a:solidFill>
-                  <a:prstClr val="black"/>
-                </a:solidFill>
-                <a:latin typeface="Lato" panose="020F0502020204030203" pitchFamily="34" charset="0"/>
-                <a:cs typeface="Segoe UI" panose="020B0502040204020203" pitchFamily="34" charset="0"/>
-              </a:rPr>
-              <a:t>…….</a:t>
-            </a:r>
-          </a:p>
-        </p:txBody>
-      </p:sp>
     </p:spTree>
     <p:extLst>
       <p:ext uri="{BB962C8B-B14F-4D97-AF65-F5344CB8AC3E}">
